--- a/public/documentos/Apresentacao_Alma4D_Metodo.pptx
+++ b/public/documentos/Apresentacao_Alma4D_Metodo.pptx
@@ -5141,7 +5141,7 @@
                 <a:ea typeface="Calibri" pitchFamily="34" charset="-122"/>
                 <a:cs typeface="Calibri" pitchFamily="34" charset="-120"/>
               </a:rPr>
-              <a:t>Score </a:t>
+              <a:t>Score total, </a:t>
             </a:r>
             <a:r>
               <a:rPr lang="en-US" sz="1200" dirty="0" err="1">
@@ -5194,15 +5194,24 @@
               <a:buNone/>
             </a:pPr>
             <a:r>
+              <a:rPr lang="en-US" sz="1200" dirty="0">
+                <a:solidFill>
+                  <a:srgbClr val="0A0A2E"/>
+                </a:solidFill>
+                <a:latin typeface="Calibri" pitchFamily="34" charset="0"/>
+                <a:cs typeface="Calibri" pitchFamily="34" charset="-120"/>
+              </a:rPr>
+              <a:t>E </a:t>
+            </a:r>
+            <a:r>
               <a:rPr lang="en-US" sz="1200" dirty="0" err="1">
                 <a:solidFill>
                   <a:srgbClr val="0A0A2E"/>
                 </a:solidFill>
                 <a:latin typeface="Calibri" pitchFamily="34" charset="0"/>
-                <a:ea typeface="Calibri" pitchFamily="34" charset="-122"/>
-                <a:cs typeface="Calibri" pitchFamily="34" charset="-120"/>
-              </a:rPr>
-              <a:t>análise</a:t>
+                <a:cs typeface="Calibri" pitchFamily="34" charset="-120"/>
+              </a:rPr>
+              <a:t>por</a:t>
             </a:r>
             <a:r>
               <a:rPr lang="en-US" sz="1200" dirty="0">
@@ -5210,21 +5219,9 @@
                   <a:srgbClr val="0A0A2E"/>
                 </a:solidFill>
                 <a:latin typeface="Calibri" pitchFamily="34" charset="0"/>
-                <a:ea typeface="Calibri" pitchFamily="34" charset="-122"/>
-                <a:cs typeface="Calibri" pitchFamily="34" charset="-120"/>
-              </a:rPr>
-              <a:t> de </a:t>
-            </a:r>
-            <a:r>
-              <a:rPr lang="en-US" sz="1200" dirty="0" err="1">
-                <a:solidFill>
-                  <a:srgbClr val="0A0A2E"/>
-                </a:solidFill>
-                <a:latin typeface="Calibri" pitchFamily="34" charset="0"/>
-                <a:ea typeface="Calibri" pitchFamily="34" charset="-122"/>
-                <a:cs typeface="Calibri" pitchFamily="34" charset="-120"/>
-              </a:rPr>
-              <a:t>evolução</a:t>
+                <a:cs typeface="Calibri" pitchFamily="34" charset="-120"/>
+              </a:rPr>
+              <a:t> item dimensional.</a:t>
             </a:r>
             <a:endParaRPr lang="en-US" sz="1200" dirty="0"/>
           </a:p>
@@ -5457,15 +5454,84 @@
               <a:buNone/>
             </a:pPr>
             <a:r>
+              <a:rPr lang="en-US" sz="1200" dirty="0" err="1">
+                <a:solidFill>
+                  <a:srgbClr val="0A0A2E"/>
+                </a:solidFill>
+                <a:latin typeface="Calibri" pitchFamily="34" charset="0"/>
+                <a:cs typeface="Calibri" pitchFamily="34" charset="-120"/>
+              </a:rPr>
+              <a:t>Visualização</a:t>
+            </a:r>
+            <a:r>
               <a:rPr lang="en-US" sz="1200" dirty="0">
                 <a:solidFill>
                   <a:srgbClr val="0A0A2E"/>
                 </a:solidFill>
                 <a:latin typeface="Calibri" pitchFamily="34" charset="0"/>
-                <a:ea typeface="Calibri" pitchFamily="34" charset="-122"/>
-                <a:cs typeface="Calibri" pitchFamily="34" charset="-120"/>
-              </a:rPr>
-              <a:t>alertas de Burnout e Turnover</a:t>
+                <a:cs typeface="Calibri" pitchFamily="34" charset="-120"/>
+              </a:rPr>
+              <a:t> de </a:t>
+            </a:r>
+            <a:r>
+              <a:rPr lang="en-US" sz="1200" dirty="0" err="1">
+                <a:solidFill>
+                  <a:srgbClr val="0A0A2E"/>
+                </a:solidFill>
+                <a:latin typeface="Calibri" pitchFamily="34" charset="0"/>
+                <a:cs typeface="Calibri" pitchFamily="34" charset="-120"/>
+              </a:rPr>
+              <a:t>evolutivos</a:t>
+            </a:r>
+            <a:r>
+              <a:rPr lang="en-US" sz="1200" dirty="0">
+                <a:solidFill>
+                  <a:srgbClr val="0A0A2E"/>
+                </a:solidFill>
+                <a:latin typeface="Calibri" pitchFamily="34" charset="0"/>
+                <a:cs typeface="Calibri" pitchFamily="34" charset="-120"/>
+              </a:rPr>
+              <a:t>, </a:t>
+            </a:r>
+            <a:r>
+              <a:rPr lang="en-US" sz="1200" dirty="0" err="1">
+                <a:solidFill>
+                  <a:srgbClr val="0A0A2E"/>
+                </a:solidFill>
+                <a:latin typeface="Calibri" pitchFamily="34" charset="0"/>
+                <a:cs typeface="Calibri" pitchFamily="34" charset="-120"/>
+              </a:rPr>
+              <a:t>análises</a:t>
+            </a:r>
+            <a:r>
+              <a:rPr lang="en-US" sz="1200" dirty="0">
+                <a:solidFill>
+                  <a:srgbClr val="0A0A2E"/>
+                </a:solidFill>
+                <a:latin typeface="Calibri" pitchFamily="34" charset="0"/>
+                <a:cs typeface="Calibri" pitchFamily="34" charset="-120"/>
+              </a:rPr>
+              <a:t> de </a:t>
+            </a:r>
+            <a:r>
+              <a:rPr lang="en-US" sz="1200" dirty="0" err="1">
+                <a:solidFill>
+                  <a:srgbClr val="0A0A2E"/>
+                </a:solidFill>
+                <a:latin typeface="Calibri" pitchFamily="34" charset="0"/>
+                <a:cs typeface="Calibri" pitchFamily="34" charset="-120"/>
+              </a:rPr>
+              <a:t>Inteligência</a:t>
+            </a:r>
+            <a:r>
+              <a:rPr lang="en-US" sz="1200" dirty="0">
+                <a:solidFill>
+                  <a:srgbClr val="0A0A2E"/>
+                </a:solidFill>
+                <a:latin typeface="Calibri" pitchFamily="34" charset="0"/>
+                <a:cs typeface="Calibri" pitchFamily="34" charset="-120"/>
+              </a:rPr>
+              <a:t> Artificial.</a:t>
             </a:r>
             <a:endParaRPr lang="en-US" sz="1200" dirty="0"/>
           </a:p>

--- a/public/documentos/Apresentacao_Alma4D_Metodo.pptx
+++ b/public/documentos/Apresentacao_Alma4D_Metodo.pptx
@@ -2363,7 +2363,7 @@
         <p:spPr>
           <a:xfrm>
             <a:off x="548640" y="3794760"/>
-            <a:ext cx="8046720" cy="822960"/>
+            <a:ext cx="8229600" cy="822960"/>
           </a:xfrm>
           <a:prstGeom prst="rect">
             <a:avLst/>
@@ -4903,7 +4903,7 @@
               <a:buNone/>
             </a:pPr>
             <a:r>
-              <a:rPr lang="en-US" sz="1200" dirty="0" err="1">
+              <a:rPr lang="en-US" sz="1400" b="1" dirty="0" err="1">
                 <a:solidFill>
                   <a:srgbClr val="0A0A2E"/>
                 </a:solidFill>
@@ -4914,7 +4914,7 @@
               <a:t>Autoavaliação</a:t>
             </a:r>
             <a:r>
-              <a:rPr lang="en-US" sz="1200" dirty="0">
+              <a:rPr lang="en-US" sz="1400" b="1" dirty="0">
                 <a:solidFill>
                   <a:srgbClr val="0A0A2E"/>
                 </a:solidFill>
@@ -4924,7 +4924,7 @@
               </a:rPr>
               <a:t> estruturada</a:t>
             </a:r>
-            <a:endParaRPr lang="en-US" sz="1200" dirty="0"/>
+            <a:endParaRPr lang="en-US" sz="1400" b="1" dirty="0"/>
           </a:p>
           <a:p>
             <a:pPr marL="0" indent="0">
@@ -5133,6 +5133,17 @@
               <a:buNone/>
             </a:pPr>
             <a:r>
+              <a:rPr lang="en-US" sz="1400" b="1" dirty="0">
+                <a:solidFill>
+                  <a:srgbClr val="0A0A2E"/>
+                </a:solidFill>
+                <a:latin typeface="Calibri" pitchFamily="34" charset="0"/>
+                <a:ea typeface="Calibri" pitchFamily="34" charset="-122"/>
+                <a:cs typeface="Calibri" pitchFamily="34" charset="-120"/>
+              </a:rPr>
+              <a:t>Score total</a:t>
+            </a:r>
+            <a:r>
               <a:rPr lang="en-US" sz="1200" dirty="0">
                 <a:solidFill>
                   <a:srgbClr val="0A0A2E"/>
@@ -5141,7 +5152,7 @@
                 <a:ea typeface="Calibri" pitchFamily="34" charset="-122"/>
                 <a:cs typeface="Calibri" pitchFamily="34" charset="-120"/>
               </a:rPr>
-              <a:t>Score total, </a:t>
+              <a:t>, </a:t>
             </a:r>
             <a:r>
               <a:rPr lang="en-US" sz="1200" dirty="0" err="1">
@@ -5415,6 +5426,39 @@
               <a:buNone/>
             </a:pPr>
             <a:r>
+              <a:rPr lang="en-US" sz="1400" b="1" dirty="0">
+                <a:solidFill>
+                  <a:srgbClr val="0A0A2E"/>
+                </a:solidFill>
+                <a:latin typeface="Calibri" pitchFamily="34" charset="0"/>
+                <a:ea typeface="Calibri" pitchFamily="34" charset="-122"/>
+                <a:cs typeface="Calibri" pitchFamily="34" charset="-120"/>
+              </a:rPr>
+              <a:t>Dashboard </a:t>
+            </a:r>
+            <a:r>
+              <a:rPr lang="en-US" sz="1400" b="1" dirty="0" err="1">
+                <a:solidFill>
+                  <a:srgbClr val="0A0A2E"/>
+                </a:solidFill>
+                <a:latin typeface="Calibri" pitchFamily="34" charset="0"/>
+                <a:ea typeface="Calibri" pitchFamily="34" charset="-122"/>
+                <a:cs typeface="Calibri" pitchFamily="34" charset="-120"/>
+              </a:rPr>
+              <a:t>estratégico</a:t>
+            </a:r>
+            <a:r>
+              <a:rPr lang="en-US" sz="1400" b="1" dirty="0">
+                <a:solidFill>
+                  <a:srgbClr val="0A0A2E"/>
+                </a:solidFill>
+                <a:latin typeface="Calibri" pitchFamily="34" charset="0"/>
+                <a:ea typeface="Calibri" pitchFamily="34" charset="-122"/>
+                <a:cs typeface="Calibri" pitchFamily="34" charset="-120"/>
+              </a:rPr>
+              <a:t> </a:t>
+            </a:r>
+            <a:r>
               <a:rPr lang="en-US" sz="1200" dirty="0">
                 <a:solidFill>
                   <a:srgbClr val="0A0A2E"/>
@@ -5423,29 +5467,7 @@
                 <a:ea typeface="Calibri" pitchFamily="34" charset="-122"/>
                 <a:cs typeface="Calibri" pitchFamily="34" charset="-120"/>
               </a:rPr>
-              <a:t>Dashboard </a:t>
-            </a:r>
-            <a:r>
-              <a:rPr lang="en-US" sz="1200" dirty="0" err="1">
-                <a:solidFill>
-                  <a:srgbClr val="0A0A2E"/>
-                </a:solidFill>
-                <a:latin typeface="Calibri" pitchFamily="34" charset="0"/>
-                <a:ea typeface="Calibri" pitchFamily="34" charset="-122"/>
-                <a:cs typeface="Calibri" pitchFamily="34" charset="-120"/>
-              </a:rPr>
-              <a:t>estratégico</a:t>
-            </a:r>
-            <a:r>
-              <a:rPr lang="en-US" sz="1200" dirty="0">
-                <a:solidFill>
-                  <a:srgbClr val="0A0A2E"/>
-                </a:solidFill>
-                <a:latin typeface="Calibri" pitchFamily="34" charset="0"/>
-                <a:ea typeface="Calibri" pitchFamily="34" charset="-122"/>
-                <a:cs typeface="Calibri" pitchFamily="34" charset="-120"/>
-              </a:rPr>
-              <a:t> com</a:t>
+              <a:t>com</a:t>
             </a:r>
             <a:endParaRPr lang="en-US" sz="1200" dirty="0"/>
           </a:p>
@@ -5546,7 +5568,7 @@
         <p:spPr>
           <a:xfrm>
             <a:off x="548640" y="3749040"/>
-            <a:ext cx="8046720" cy="914400"/>
+            <a:ext cx="8229600" cy="914400"/>
           </a:xfrm>
           <a:prstGeom prst="rect">
             <a:avLst/>
@@ -6190,6 +6212,17 @@
               <a:buNone/>
             </a:pPr>
             <a:r>
+              <a:rPr lang="en-US" sz="1500" b="1" dirty="0" err="1">
+                <a:solidFill>
+                  <a:srgbClr val="0A0A2E"/>
+                </a:solidFill>
+                <a:latin typeface="Calibri" pitchFamily="34" charset="0"/>
+                <a:ea typeface="Calibri" pitchFamily="34" charset="-122"/>
+                <a:cs typeface="Calibri" pitchFamily="34" charset="-120"/>
+              </a:rPr>
+              <a:t>Visão</a:t>
+            </a:r>
+            <a:r>
               <a:rPr lang="en-US" sz="1500" b="1" dirty="0">
                 <a:solidFill>
                   <a:srgbClr val="0A0A2E"/>
@@ -6198,7 +6231,7 @@
                 <a:ea typeface="Calibri" pitchFamily="34" charset="-122"/>
                 <a:cs typeface="Calibri" pitchFamily="34" charset="-120"/>
               </a:rPr>
-              <a:t>Visao </a:t>
+              <a:t> </a:t>
             </a:r>
             <a:r>
               <a:rPr lang="en-US" sz="1500" b="1" dirty="0" err="1">
